--- a/07_Presentation/NovaPay_FPA_Dashboard_Presentation.pptx
+++ b/07_Presentation/NovaPay_FPA_Dashboard_Presentation.pptx
@@ -640,7 +640,7 @@
           <a:p>
             <a:r>
               <a:rPr lang="en-US" dirty="0"/>
-              <a:t>The project follows a classic FP&amp;A technology stack. Excel is the source-of-truth financial model, SQL performs deep-dive analysis, Python generates forecasts, Power BI visualizes performance, and the executive report delivers insights to leadership.</a:t>
+              <a:t>Excel holds the P&amp;L, budget vs. actual and scenario sheets. SQL queries summarize revenue, variances and customer KPIs. The Python notebook rebuilds the revenue-to-EBITDA bridge, budget vs. actual, expense overruns and one-month scenarios. Power BI presents it, and the executive report summarizes the findings.</a:t>
             </a:r>
           </a:p>
         </p:txBody>
@@ -814,7 +814,7 @@
           <a:p>
             <a:r>
               <a:rPr lang="en-US" dirty="0"/>
-              <a:t>The Power BI dashboard provides an interactive single-page view of all financial KPIs. The month slicer allows users to filter all panels simultaneously. KPI cards update dynamically with revenue, gross margin, EBITDA, active customers, and churn rate.</a:t>
+              <a:t>The Power BI dashboard is a single interactive page. The month slicer filters every panel. KPI cards show revenue, gross margin, EBITDA, active customers and revenue vs. budget.</a:t>
             </a:r>
           </a:p>
         </p:txBody>
@@ -901,7 +901,7 @@
           <a:p>
             <a:r>
               <a:rPr lang="en-US" dirty="0"/>
-              <a:t>These six insights summarize the most material findings from the financial analysis. The growth story is positive on revenue but the cost structure needs attention. CAC and customer concentration are risk areas requiring strategic action.</a:t>
+              <a:t>Four findings: revenue more than doubled but EBITDA got worse; revenue beat budget while EBITDA missed every month because of opex overruns; one customer is about 40% of revenue; and each new customer costs roughly $10K to acquire. All figures come from a fictional six-month dataset.</a:t>
             </a:r>
           </a:p>
         </p:txBody>
@@ -1075,7 +1075,7 @@
           <a:p>
             <a:r>
               <a:rPr lang="en-US" dirty="0"/>
-              <a:t>The Python forecasting engine generates scenario outputs for Base, Bull, and Bear cases by applying growth rate, churn, and payroll inflation assumptions to the latest actuals. SQL queries provide 12 reusable analytical views for ongoing management reporting.</a:t>
+              <a:t>The scenarios apply the base, upside and downside assumptions to June actuals for a one-month view of July, using the same logic in Excel and Python. Six months of data is not enough for a statistical forecast, so these are what-ifs, not predictions. All three keep EBITDA negative.</a:t>
             </a:r>
           </a:p>
         </p:txBody>
@@ -2496,7 +2496,7 @@
                 <a:ea typeface="Calibri" pitchFamily="34" charset="-122"/>
                 <a:cs typeface="Calibri" pitchFamily="34" charset="-120"/>
               </a:rPr>
-              <a:t>AI-Enabled FP&amp;A Command Center</a:t>
+              <a:t>FP&amp;A Analytics &amp; Management Reporting</a:t>
             </a:r>
             <a:endParaRPr lang="en-US" sz="1600" dirty="0"/>
           </a:p>
@@ -4672,7 +4672,7 @@
                 <a:ea typeface="Calibri" pitchFamily="34" charset="-122"/>
                 <a:cs typeface="Calibri" pitchFamily="34" charset="-120"/>
               </a:rPr>
-              <a:t>Python Forecasting</a:t>
+              <a:t>Python Analysis</a:t>
             </a:r>
             <a:endParaRPr lang="en-US" sz="1050" dirty="0"/>
           </a:p>
@@ -4711,7 +4711,7 @@
                 <a:ea typeface="Calibri" pitchFamily="34" charset="-122"/>
                 <a:cs typeface="Calibri" pitchFamily="34" charset="-120"/>
               </a:rPr>
-              <a:t>Scenarios &amp; Risk Flags</a:t>
+              <a:t>Variance &amp; Scenarios</a:t>
             </a:r>
             <a:endParaRPr lang="en-US" sz="900" dirty="0"/>
           </a:p>
@@ -7020,7 +7020,7 @@
                 <a:ea typeface="Calibri" pitchFamily="34" charset="-122"/>
                 <a:cs typeface="Calibri" pitchFamily="34" charset="-120"/>
               </a:rPr>
-              <a:t>No view on customer acquisition cost vs. lifetime value</a:t>
+              <a:t>No view on acquisition cost relative to revenue per customer</a:t>
             </a:r>
             <a:endParaRPr lang="en-US" sz="1050" dirty="0"/>
           </a:p>
@@ -8178,7 +8178,7 @@
                 <a:ea typeface="Calibri" pitchFamily="34" charset="-122"/>
                 <a:cs typeface="Calibri" pitchFamily="34" charset="-120"/>
               </a:rPr>
-              <a:t>Forecasting</a:t>
+              <a:t>Analysis</a:t>
             </a:r>
             <a:endParaRPr lang="en-US" sz="1000" dirty="0"/>
           </a:p>
@@ -8217,7 +8217,7 @@
                 <a:ea typeface="Calibri" pitchFamily="34" charset="-122"/>
                 <a:cs typeface="Calibri" pitchFamily="34" charset="-120"/>
               </a:rPr>
-              <a:t>Pandas/NumPy notebook: scenario forecasting, KPI risk flagging, EBITDA trend, CFO auto-commentary</a:t>
+              <a:t>Pandas notebook: EBITDA bridge, budget vs. actual, expense overruns, concentration, scenarios</a:t>
             </a:r>
             <a:endParaRPr lang="en-US" sz="1000" dirty="0"/>
           </a:p>
@@ -8527,7 +8527,7 @@
                 <a:ea typeface="Calibri" pitchFamily="34" charset="-122"/>
                 <a:cs typeface="Calibri" pitchFamily="34" charset="-120"/>
               </a:rPr>
-              <a:t>7-panel interactive dashboard with month slicer, KPI cards, revenue trend, budget vs. actual, and more</a:t>
+              <a:t>6-chart interactive dashboard with month slicer, KPI cards, revenue trend, budget vs. actual, and more</a:t>
             </a:r>
             <a:endParaRPr lang="en-US" sz="1000" dirty="0"/>
           </a:p>
@@ -9974,7 +9974,7 @@
                 <a:ea typeface="Calibri" pitchFamily="34" charset="-122"/>
                 <a:cs typeface="Calibri" pitchFamily="34" charset="-120"/>
               </a:rPr>
-              <a:t>Customer ID, Name, Segment, Onboard Date, Plan Type</a:t>
+              <a:t>Customer ID, Customer Name</a:t>
             </a:r>
             <a:endParaRPr lang="en-US" sz="900" dirty="0"/>
           </a:p>
@@ -10084,29 +10084,6 @@
           </a:p>
         </p:txBody>
       </p:sp>
-      <p:pic>
-        <p:nvPicPr>
-          <p:cNvPr id="4" name="Image 0" descr="preencoded.png"/>
-          <p:cNvPicPr>
-            <a:picLocks noChangeAspect="1"/>
-          </p:cNvPicPr>
-          <p:nvPr/>
-        </p:nvPicPr>
-        <p:blipFill>
-          <a:blip r:embed="rId3"/>
-          <a:srcRect/>
-          <a:stretch/>
-        </p:blipFill>
-        <p:spPr>
-          <a:xfrm>
-            <a:off x="228600" y="822960"/>
-            <a:ext cx="6400800" cy="3611880"/>
-          </a:xfrm>
-          <a:prstGeom prst="rect">
-            <a:avLst/>
-          </a:prstGeom>
-        </p:spPr>
-      </p:pic>
       <p:sp>
         <p:nvSpPr>
           <p:cNvPr id="5" name="Shape 2"/>
@@ -10243,7 +10220,7 @@
                 <a:ea typeface="Calibri" pitchFamily="34" charset="-122"/>
                 <a:cs typeface="Calibri" pitchFamily="34" charset="-120"/>
               </a:rPr>
-              <a:t>Revenue · Margin · EBITDA · Customers · Churn</a:t>
+              <a:t>Revenue · Margin · EBITDA · Customers · Revenue vs Budget</a:t>
             </a:r>
             <a:endParaRPr lang="en-US" sz="900" dirty="0"/>
           </a:p>
@@ -10959,6 +10936,36 @@
           </a:p>
         </p:txBody>
       </p:sp>
+      <p:pic>
+        <p:nvPicPr>
+          <p:cNvPr id="30" name="Picture 29">
+            <a:extLst>
+              <a:ext uri="{FF2B5EF4-FFF2-40B4-BE49-F238E27FC236}">
+                <a16:creationId xmlns:a16="http://schemas.microsoft.com/office/drawing/2014/main" id="{AE1FBDF6-1ACA-1C4E-066C-635B2158BBFB}"/>
+              </a:ext>
+            </a:extLst>
+          </p:cNvPr>
+          <p:cNvPicPr>
+            <a:picLocks noChangeAspect="1"/>
+          </p:cNvPicPr>
+          <p:nvPr/>
+        </p:nvPicPr>
+        <p:blipFill>
+          <a:blip r:embed="rId3"/>
+          <a:stretch>
+            <a:fillRect/>
+          </a:stretch>
+        </p:blipFill>
+        <p:spPr>
+          <a:xfrm>
+            <a:off x="162008" y="827180"/>
+            <a:ext cx="6506078" cy="3906598"/>
+          </a:xfrm>
+          <a:prstGeom prst="rect">
+            <a:avLst/>
+          </a:prstGeom>
+        </p:spPr>
+      </p:pic>
     </p:spTree>
   </p:cSld>
   <p:clrMapOvr>
@@ -11072,7 +11079,7 @@
         <p:spPr>
           <a:xfrm>
             <a:off x="320040" y="960120"/>
-            <a:ext cx="4114800" cy="1234440"/>
+            <a:ext cx="4114800" cy="1600200"/>
           </a:xfrm>
           <a:prstGeom prst="rect">
             <a:avLst/>
@@ -11181,8 +11188,8 @@
         </p:nvSpPr>
         <p:spPr>
           <a:xfrm>
-            <a:off x="3246120" y="1033272"/>
-            <a:ext cx="1097280" cy="411480"/>
+            <a:off x="3474720" y="1033272"/>
+            <a:ext cx="868680" cy="411480"/>
           </a:xfrm>
           <a:prstGeom prst="rect">
             <a:avLst/>
@@ -11213,8 +11220,8 @@
         </p:nvSpPr>
         <p:spPr>
           <a:xfrm>
-            <a:off x="3246120" y="1033272"/>
-            <a:ext cx="1097280" cy="411480"/>
+            <a:off x="3474720" y="1033272"/>
+            <a:ext cx="868680" cy="411480"/>
           </a:xfrm>
           <a:prstGeom prst="rect">
             <a:avLst/>
@@ -11238,7 +11245,7 @@
                 <a:ea typeface="Calibri" pitchFamily="34" charset="-122"/>
                 <a:cs typeface="Calibri" pitchFamily="34" charset="-120"/>
               </a:rPr>
-              <a:t>Strong</a:t>
+              <a:t>+128%</a:t>
             </a:r>
             <a:endParaRPr lang="en-US" sz="1300" dirty="0"/>
           </a:p>
@@ -11253,7 +11260,7 @@
         <p:spPr>
           <a:xfrm>
             <a:off x="1033272" y="1024128"/>
-            <a:ext cx="2121408" cy="320040"/>
+            <a:ext cx="2395728" cy="320040"/>
           </a:xfrm>
           <a:prstGeom prst="rect">
             <a:avLst/>
@@ -11269,7 +11276,7 @@
               <a:buNone/>
             </a:pPr>
             <a:r>
-              <a:rPr lang="en-US" sz="1300" b="1" dirty="0">
+              <a:rPr lang="en-US" sz="1200" b="1" dirty="0">
                 <a:solidFill>
                   <a:srgbClr val="1B2A4A"/>
                 </a:solidFill>
@@ -11277,7 +11284,7 @@
                 <a:ea typeface="Calibri" pitchFamily="34" charset="-122"/>
                 <a:cs typeface="Calibri" pitchFamily="34" charset="-120"/>
               </a:rPr>
-              <a:t>Revenue Growth</a:t>
+              <a:t>Revenue Up, EBITDA Down</a:t>
             </a:r>
             <a:endParaRPr lang="en-US" sz="1300" dirty="0"/>
           </a:p>
@@ -11292,7 +11299,7 @@
         <p:spPr>
           <a:xfrm>
             <a:off x="1033272" y="1344168"/>
-            <a:ext cx="2121408" cy="219456"/>
+            <a:ext cx="2395728" cy="219456"/>
           </a:xfrm>
           <a:prstGeom prst="rect">
             <a:avLst/>
@@ -11334,8 +11341,8 @@
         </p:nvSpPr>
         <p:spPr>
           <a:xfrm>
-            <a:off x="411480" y="1618488"/>
-            <a:ext cx="3931920" cy="502920"/>
+            <a:off x="411480" y="1600200"/>
+            <a:ext cx="3931920" cy="868680"/>
           </a:xfrm>
           <a:prstGeom prst="rect">
             <a:avLst/>
@@ -11344,14 +11351,14 @@
           <a:ln/>
         </p:spPr>
         <p:txBody>
-          <a:bodyPr wrap="square" rtlCol="0" anchor="ctr"/>
+          <a:bodyPr wrap="square" rtlCol="0" anchor="t"/>
           <a:lstStyle/>
           <a:p>
             <a:pPr marL="0" indent="0">
               <a:buNone/>
             </a:pPr>
             <a:r>
-              <a:rPr lang="en-US" sz="1000" dirty="0">
+              <a:rPr lang="en-US" sz="1200" dirty="0">
                 <a:solidFill>
                   <a:srgbClr val="334155"/>
                 </a:solidFill>
@@ -11359,7 +11366,7 @@
                 <a:ea typeface="Calibri" pitchFamily="34" charset="-122"/>
                 <a:cs typeface="Calibri" pitchFamily="34" charset="-120"/>
               </a:rPr>
-              <a:t>Monthly revenue increased from around $4.2K in Jan to around $9.5K in Jun, driven by new customer onboarding and transaction volume.</a:t>
+              <a:t>Monthly revenue rose from $4.2K to $9.5K, but EBITDA moved from –$35.0K to –$37.7K. Gross profit rose $3.1K while operating expenses rose $5.9K.</a:t>
             </a:r>
             <a:endParaRPr lang="en-US" sz="1000" dirty="0"/>
           </a:p>
@@ -11374,7 +11381,7 @@
         <p:spPr>
           <a:xfrm>
             <a:off x="4663440" y="960120"/>
-            <a:ext cx="4114800" cy="1234440"/>
+            <a:ext cx="4114800" cy="1600200"/>
           </a:xfrm>
           <a:prstGeom prst="rect">
             <a:avLst/>
@@ -11419,11 +11426,11 @@
             <a:avLst/>
           </a:prstGeom>
           <a:solidFill>
-            <a:srgbClr val="DC2626"/>
-          </a:solidFill>
-          <a:ln w="12700">
-            <a:solidFill>
-              <a:srgbClr val="DC2626"/>
+            <a:srgbClr val="B45309"/>
+          </a:solidFill>
+          <a:ln w="12700">
+            <a:solidFill>
+              <a:srgbClr val="B45309"/>
             </a:solidFill>
             <a:prstDash val="solid"/>
           </a:ln>
@@ -11483,18 +11490,18 @@
         </p:nvSpPr>
         <p:spPr>
           <a:xfrm>
-            <a:off x="7589520" y="1033272"/>
-            <a:ext cx="1097280" cy="411480"/>
-          </a:xfrm>
-          <a:prstGeom prst="rect">
-            <a:avLst/>
-          </a:prstGeom>
-          <a:solidFill>
-            <a:srgbClr val="DC2626"/>
-          </a:solidFill>
-          <a:ln w="12700">
-            <a:solidFill>
-              <a:srgbClr val="DC2626"/>
+            <a:off x="7818120" y="1033272"/>
+            <a:ext cx="868680" cy="411480"/>
+          </a:xfrm>
+          <a:prstGeom prst="rect">
+            <a:avLst/>
+          </a:prstGeom>
+          <a:solidFill>
+            <a:srgbClr val="B45309"/>
+          </a:solidFill>
+          <a:ln w="12700">
+            <a:solidFill>
+              <a:srgbClr val="B45309"/>
             </a:solidFill>
             <a:prstDash val="solid"/>
           </a:ln>
@@ -11515,8 +11522,8 @@
         </p:nvSpPr>
         <p:spPr>
           <a:xfrm>
-            <a:off x="7589520" y="1033272"/>
-            <a:ext cx="1097280" cy="411480"/>
+            <a:off x="7818120" y="1033272"/>
+            <a:ext cx="868680" cy="411480"/>
           </a:xfrm>
           <a:prstGeom prst="rect">
             <a:avLst/>
@@ -11540,7 +11547,7 @@
                 <a:ea typeface="Calibri" pitchFamily="34" charset="-122"/>
                 <a:cs typeface="Calibri" pitchFamily="34" charset="-120"/>
               </a:rPr>
-              <a:t>–$222K</a:t>
+              <a:t>+17%</a:t>
             </a:r>
             <a:endParaRPr lang="en-US" sz="1300" dirty="0"/>
           </a:p>
@@ -11555,7 +11562,7 @@
         <p:spPr>
           <a:xfrm>
             <a:off x="5376672" y="1024128"/>
-            <a:ext cx="2121408" cy="320040"/>
+            <a:ext cx="2395728" cy="320040"/>
           </a:xfrm>
           <a:prstGeom prst="rect">
             <a:avLst/>
@@ -11571,7 +11578,7 @@
               <a:buNone/>
             </a:pPr>
             <a:r>
-              <a:rPr lang="en-US" sz="1300" b="1" dirty="0">
+              <a:rPr lang="en-US" sz="1200" b="1" dirty="0">
                 <a:solidFill>
                   <a:srgbClr val="1B2A4A"/>
                 </a:solidFill>
@@ -11579,7 +11586,7 @@
                 <a:ea typeface="Calibri" pitchFamily="34" charset="-122"/>
                 <a:cs typeface="Calibri" pitchFamily="34" charset="-120"/>
               </a:rPr>
-              <a:t>Total EBITDA</a:t>
+              <a:t>Revenue Beat, EBITDA Missed</a:t>
             </a:r>
             <a:endParaRPr lang="en-US" sz="1300" dirty="0"/>
           </a:p>
@@ -11594,7 +11601,7 @@
         <p:spPr>
           <a:xfrm>
             <a:off x="5376672" y="1344168"/>
-            <a:ext cx="2121408" cy="219456"/>
+            <a:ext cx="2395728" cy="219456"/>
           </a:xfrm>
           <a:prstGeom prst="rect">
             <a:avLst/>
@@ -11618,7 +11625,7 @@
                 <a:ea typeface="Calibri" pitchFamily="34" charset="-122"/>
                 <a:cs typeface="Calibri" pitchFamily="34" charset="-120"/>
               </a:rPr>
-              <a:t>Analysis Period</a:t>
+              <a:t>Budget vs. Actual</a:t>
             </a:r>
             <a:endParaRPr lang="en-US" sz="1000" dirty="0">
               <a:solidFill>
@@ -11636,8 +11643,8 @@
         </p:nvSpPr>
         <p:spPr>
           <a:xfrm>
-            <a:off x="4754880" y="1618488"/>
-            <a:ext cx="3931920" cy="502920"/>
+            <a:off x="4754880" y="1600200"/>
+            <a:ext cx="3931920" cy="868680"/>
           </a:xfrm>
           <a:prstGeom prst="rect">
             <a:avLst/>
@@ -11646,14 +11653,14 @@
           <a:ln/>
         </p:spPr>
         <p:txBody>
-          <a:bodyPr wrap="square" rtlCol="0" anchor="ctr"/>
+          <a:bodyPr wrap="square" rtlCol="0" anchor="t"/>
           <a:lstStyle/>
           <a:p>
             <a:pPr marL="0" indent="0">
               <a:buNone/>
             </a:pPr>
             <a:r>
-              <a:rPr lang="en-US" sz="1000" dirty="0">
+              <a:rPr lang="en-US" sz="1200" dirty="0">
                 <a:solidFill>
                   <a:srgbClr val="334155"/>
                 </a:solidFill>
@@ -11661,7 +11668,7 @@
                 <a:ea typeface="Calibri" pitchFamily="34" charset="-122"/>
                 <a:cs typeface="Calibri" pitchFamily="34" charset="-120"/>
               </a:rPr>
-              <a:t>EBITDA remained negative across the analysis period because operating expenses exceeded revenue throughout.</a:t>
+              <a:t>Six-month revenue was $35.0K vs. a $29.9K budget, but opex ran over plan every month (cloud hosting +$5.1K, marketing +$4.9K), so EBITDA missed budget in all six months.</a:t>
             </a:r>
             <a:endParaRPr lang="en-US" sz="1000" dirty="0"/>
           </a:p>
@@ -11669,14 +11676,14 @@
       </p:sp>
       <p:sp>
         <p:nvSpPr>
-          <p:cNvPr id="20" name="Shape 18"/>
-          <p:cNvSpPr/>
-          <p:nvPr/>
-        </p:nvSpPr>
-        <p:spPr>
-          <a:xfrm>
-            <a:off x="320040" y="2331720"/>
-            <a:ext cx="4114800" cy="1234440"/>
+          <p:cNvPr id="36" name="Shape 34"/>
+          <p:cNvSpPr/>
+          <p:nvPr/>
+        </p:nvSpPr>
+        <p:spPr>
+          <a:xfrm>
+            <a:off x="320040" y="2743200"/>
+            <a:ext cx="4114800" cy="1600200"/>
           </a:xfrm>
           <a:prstGeom prst="rect">
             <a:avLst/>
@@ -11708,45 +11715,45 @@
       </p:sp>
       <p:sp>
         <p:nvSpPr>
-          <p:cNvPr id="21" name="Shape 19"/>
-          <p:cNvSpPr/>
-          <p:nvPr/>
-        </p:nvSpPr>
-        <p:spPr>
-          <a:xfrm>
-            <a:off x="411480" y="2423160"/>
+          <p:cNvPr id="37" name="Shape 35"/>
+          <p:cNvSpPr/>
+          <p:nvPr/>
+        </p:nvSpPr>
+        <p:spPr>
+          <a:xfrm>
+            <a:off x="411480" y="2834640"/>
             <a:ext cx="502920" cy="502920"/>
           </a:xfrm>
           <a:prstGeom prst="ellipse">
             <a:avLst/>
           </a:prstGeom>
           <a:solidFill>
-            <a:srgbClr val="B45309"/>
-          </a:solidFill>
-          <a:ln w="12700">
-            <a:solidFill>
-              <a:srgbClr val="B45309"/>
-            </a:solidFill>
-            <a:prstDash val="solid"/>
-          </a:ln>
-        </p:spPr>
-        <p:txBody>
-          <a:bodyPr/>
-          <a:lstStyle/>
-          <a:p>
-            <a:endParaRPr lang="en-US"/>
-          </a:p>
-        </p:txBody>
-      </p:sp>
-      <p:sp>
-        <p:nvSpPr>
-          <p:cNvPr id="22" name="Text 20"/>
-          <p:cNvSpPr/>
-          <p:nvPr/>
-        </p:nvSpPr>
-        <p:spPr>
-          <a:xfrm>
-            <a:off x="411480" y="2423160"/>
+            <a:srgbClr val="7C3AED"/>
+          </a:solidFill>
+          <a:ln w="12700">
+            <a:solidFill>
+              <a:srgbClr val="7C3AED"/>
+            </a:solidFill>
+            <a:prstDash val="solid"/>
+          </a:ln>
+        </p:spPr>
+        <p:txBody>
+          <a:bodyPr/>
+          <a:lstStyle/>
+          <a:p>
+            <a:endParaRPr lang="en-US"/>
+          </a:p>
+        </p:txBody>
+      </p:sp>
+      <p:sp>
+        <p:nvSpPr>
+          <p:cNvPr id="38" name="Text 36"/>
+          <p:cNvSpPr/>
+          <p:nvPr/>
+        </p:nvSpPr>
+        <p:spPr>
+          <a:xfrm>
+            <a:off x="411480" y="2834640"/>
             <a:ext cx="502920" cy="502920"/>
           </a:xfrm>
           <a:prstGeom prst="rect">
@@ -11779,46 +11786,46 @@
       </p:sp>
       <p:sp>
         <p:nvSpPr>
-          <p:cNvPr id="23" name="Shape 21"/>
-          <p:cNvSpPr/>
-          <p:nvPr/>
-        </p:nvSpPr>
-        <p:spPr>
-          <a:xfrm>
-            <a:off x="3246120" y="2404872"/>
-            <a:ext cx="1097280" cy="411480"/>
-          </a:xfrm>
-          <a:prstGeom prst="rect">
-            <a:avLst/>
-          </a:prstGeom>
-          <a:solidFill>
-            <a:srgbClr val="B45309"/>
-          </a:solidFill>
-          <a:ln w="12700">
-            <a:solidFill>
-              <a:srgbClr val="B45309"/>
-            </a:solidFill>
-            <a:prstDash val="solid"/>
-          </a:ln>
-        </p:spPr>
-        <p:txBody>
-          <a:bodyPr/>
-          <a:lstStyle/>
-          <a:p>
-            <a:endParaRPr lang="en-US"/>
-          </a:p>
-        </p:txBody>
-      </p:sp>
-      <p:sp>
-        <p:nvSpPr>
-          <p:cNvPr id="24" name="Text 22"/>
-          <p:cNvSpPr/>
-          <p:nvPr/>
-        </p:nvSpPr>
-        <p:spPr>
-          <a:xfrm>
-            <a:off x="3246120" y="2404872"/>
-            <a:ext cx="1097280" cy="411480"/>
+          <p:cNvPr id="39" name="Shape 37"/>
+          <p:cNvSpPr/>
+          <p:nvPr/>
+        </p:nvSpPr>
+        <p:spPr>
+          <a:xfrm>
+            <a:off x="3474720" y="2816352"/>
+            <a:ext cx="868680" cy="411480"/>
+          </a:xfrm>
+          <a:prstGeom prst="rect">
+            <a:avLst/>
+          </a:prstGeom>
+          <a:solidFill>
+            <a:srgbClr val="7C3AED"/>
+          </a:solidFill>
+          <a:ln w="12700">
+            <a:solidFill>
+              <a:srgbClr val="7C3AED"/>
+            </a:solidFill>
+            <a:prstDash val="solid"/>
+          </a:ln>
+        </p:spPr>
+        <p:txBody>
+          <a:bodyPr/>
+          <a:lstStyle/>
+          <a:p>
+            <a:endParaRPr lang="en-US"/>
+          </a:p>
+        </p:txBody>
+      </p:sp>
+      <p:sp>
+        <p:nvSpPr>
+          <p:cNvPr id="40" name="Text 38"/>
+          <p:cNvSpPr/>
+          <p:nvPr/>
+        </p:nvSpPr>
+        <p:spPr>
+          <a:xfrm>
+            <a:off x="3474720" y="2816352"/>
+            <a:ext cx="868680" cy="411480"/>
           </a:xfrm>
           <a:prstGeom prst="rect">
             <a:avLst/>
@@ -11842,7 +11849,7 @@
                 <a:ea typeface="Calibri" pitchFamily="34" charset="-122"/>
                 <a:cs typeface="Calibri" pitchFamily="34" charset="-120"/>
               </a:rPr>
-              <a:t>69% → 63%</a:t>
+              <a:t>40%</a:t>
             </a:r>
             <a:endParaRPr lang="en-US" sz="1300" dirty="0"/>
           </a:p>
@@ -11850,14 +11857,14 @@
       </p:sp>
       <p:sp>
         <p:nvSpPr>
-          <p:cNvPr id="25" name="Text 23"/>
-          <p:cNvSpPr/>
-          <p:nvPr/>
-        </p:nvSpPr>
-        <p:spPr>
-          <a:xfrm>
-            <a:off x="1033272" y="2395728"/>
-            <a:ext cx="2121408" cy="320040"/>
+          <p:cNvPr id="41" name="Text 39"/>
+          <p:cNvSpPr/>
+          <p:nvPr/>
+        </p:nvSpPr>
+        <p:spPr>
+          <a:xfrm>
+            <a:off x="1033272" y="2807208"/>
+            <a:ext cx="2395728" cy="320040"/>
           </a:xfrm>
           <a:prstGeom prst="rect">
             <a:avLst/>
@@ -11873,7 +11880,7 @@
               <a:buNone/>
             </a:pPr>
             <a:r>
-              <a:rPr lang="en-US" sz="1300" b="1" dirty="0">
+              <a:rPr lang="en-US" sz="1200" b="1" dirty="0">
                 <a:solidFill>
                   <a:srgbClr val="1B2A4A"/>
                 </a:solidFill>
@@ -11881,7 +11888,7 @@
                 <a:ea typeface="Calibri" pitchFamily="34" charset="-122"/>
                 <a:cs typeface="Calibri" pitchFamily="34" charset="-120"/>
               </a:rPr>
-              <a:t>Gross Margin Decline</a:t>
+              <a:t>Customer Concentration</a:t>
             </a:r>
             <a:endParaRPr lang="en-US" sz="1300" dirty="0"/>
           </a:p>
@@ -11889,14 +11896,14 @@
       </p:sp>
       <p:sp>
         <p:nvSpPr>
-          <p:cNvPr id="26" name="Text 24"/>
-          <p:cNvSpPr/>
-          <p:nvPr/>
-        </p:nvSpPr>
-        <p:spPr>
-          <a:xfrm>
-            <a:off x="1033272" y="2715768"/>
-            <a:ext cx="2121408" cy="219456"/>
+          <p:cNvPr id="42" name="Text 40"/>
+          <p:cNvSpPr/>
+          <p:nvPr/>
+        </p:nvSpPr>
+        <p:spPr>
+          <a:xfrm>
+            <a:off x="1033272" y="3127248"/>
+            <a:ext cx="2395728" cy="219456"/>
           </a:xfrm>
           <a:prstGeom prst="rect">
             <a:avLst/>
@@ -11920,7 +11927,7 @@
                 <a:ea typeface="Calibri" pitchFamily="34" charset="-122"/>
                 <a:cs typeface="Calibri" pitchFamily="34" charset="-120"/>
               </a:rPr>
-              <a:t>6-Month Trend</a:t>
+              <a:t>Share of Revenue</a:t>
             </a:r>
             <a:endParaRPr lang="en-US" sz="1000" dirty="0">
               <a:solidFill>
@@ -11932,14 +11939,14 @@
       </p:sp>
       <p:sp>
         <p:nvSpPr>
-          <p:cNvPr id="27" name="Text 25"/>
-          <p:cNvSpPr/>
-          <p:nvPr/>
-        </p:nvSpPr>
-        <p:spPr>
-          <a:xfrm>
-            <a:off x="411480" y="2990088"/>
-            <a:ext cx="3931920" cy="502920"/>
+          <p:cNvPr id="43" name="Text 41"/>
+          <p:cNvSpPr/>
+          <p:nvPr/>
+        </p:nvSpPr>
+        <p:spPr>
+          <a:xfrm>
+            <a:off x="411480" y="3383280"/>
+            <a:ext cx="3931920" cy="868680"/>
           </a:xfrm>
           <a:prstGeom prst="rect">
             <a:avLst/>
@@ -11948,26 +11955,37 @@
           <a:ln/>
         </p:spPr>
         <p:txBody>
-          <a:bodyPr wrap="square" rtlCol="0" anchor="ctr"/>
-          <a:lstStyle/>
-          <a:p>
-            <a:r>
-              <a:rPr lang="en-US" sz="1000" dirty="0"/>
-              <a:t>Gross margin declined from 69% to 63%, indicating cost growth outpaced revenue efficiency.</a:t>
-            </a:r>
-          </a:p>
-        </p:txBody>
-      </p:sp>
-      <p:sp>
-        <p:nvSpPr>
-          <p:cNvPr id="28" name="Shape 26"/>
-          <p:cNvSpPr/>
-          <p:nvPr/>
-        </p:nvSpPr>
-        <p:spPr>
-          <a:xfrm>
-            <a:off x="4663440" y="2331720"/>
-            <a:ext cx="4114800" cy="1234440"/>
+          <a:bodyPr wrap="square" rtlCol="0" anchor="t"/>
+          <a:lstStyle/>
+          <a:p>
+            <a:pPr marL="0" indent="0">
+              <a:buNone/>
+            </a:pPr>
+            <a:r>
+              <a:rPr lang="en-US" sz="1200" dirty="0">
+                <a:solidFill>
+                  <a:srgbClr val="334155"/>
+                </a:solidFill>
+                <a:latin typeface="Calibri" pitchFamily="34" charset="0"/>
+                <a:ea typeface="Calibri" pitchFamily="34" charset="-122"/>
+                <a:cs typeface="Calibri" pitchFamily="34" charset="-120"/>
+              </a:rPr>
+              <a:t>TechStart Ltd generated 39.8% of six-month revenue, and the top two customers 59%. Losing one account would materially cut revenue.</a:t>
+            </a:r>
+            <a:endParaRPr lang="en-US" sz="1000" dirty="0"/>
+          </a:p>
+        </p:txBody>
+      </p:sp>
+      <p:sp>
+        <p:nvSpPr>
+          <p:cNvPr id="44" name="Shape 42"/>
+          <p:cNvSpPr/>
+          <p:nvPr/>
+        </p:nvSpPr>
+        <p:spPr>
+          <a:xfrm>
+            <a:off x="4663440" y="2743200"/>
+            <a:ext cx="4114800" cy="1600200"/>
           </a:xfrm>
           <a:prstGeom prst="rect">
             <a:avLst/>
@@ -11999,45 +12017,45 @@
       </p:sp>
       <p:sp>
         <p:nvSpPr>
-          <p:cNvPr id="29" name="Shape 27"/>
-          <p:cNvSpPr/>
-          <p:nvPr/>
-        </p:nvSpPr>
-        <p:spPr>
-          <a:xfrm>
-            <a:off x="4754880" y="2423160"/>
+          <p:cNvPr id="45" name="Shape 43"/>
+          <p:cNvSpPr/>
+          <p:nvPr/>
+        </p:nvSpPr>
+        <p:spPr>
+          <a:xfrm>
+            <a:off x="4754880" y="2834640"/>
             <a:ext cx="502920" cy="502920"/>
           </a:xfrm>
           <a:prstGeom prst="ellipse">
             <a:avLst/>
           </a:prstGeom>
           <a:solidFill>
-            <a:srgbClr val="0891B2"/>
-          </a:solidFill>
-          <a:ln w="12700">
-            <a:solidFill>
-              <a:srgbClr val="0891B2"/>
-            </a:solidFill>
-            <a:prstDash val="solid"/>
-          </a:ln>
-        </p:spPr>
-        <p:txBody>
-          <a:bodyPr/>
-          <a:lstStyle/>
-          <a:p>
-            <a:endParaRPr lang="en-US"/>
-          </a:p>
-        </p:txBody>
-      </p:sp>
-      <p:sp>
-        <p:nvSpPr>
-          <p:cNvPr id="30" name="Text 28"/>
-          <p:cNvSpPr/>
-          <p:nvPr/>
-        </p:nvSpPr>
-        <p:spPr>
-          <a:xfrm>
-            <a:off x="4754880" y="2423160"/>
+            <a:srgbClr val="DC2626"/>
+          </a:solidFill>
+          <a:ln w="12700">
+            <a:solidFill>
+              <a:srgbClr val="DC2626"/>
+            </a:solidFill>
+            <a:prstDash val="solid"/>
+          </a:ln>
+        </p:spPr>
+        <p:txBody>
+          <a:bodyPr/>
+          <a:lstStyle/>
+          <a:p>
+            <a:endParaRPr lang="en-US"/>
+          </a:p>
+        </p:txBody>
+      </p:sp>
+      <p:sp>
+        <p:nvSpPr>
+          <p:cNvPr id="46" name="Text 44"/>
+          <p:cNvSpPr/>
+          <p:nvPr/>
+        </p:nvSpPr>
+        <p:spPr>
+          <a:xfrm>
+            <a:off x="4754880" y="2834640"/>
             <a:ext cx="502920" cy="502920"/>
           </a:xfrm>
           <a:prstGeom prst="rect">
@@ -12070,46 +12088,46 @@
       </p:sp>
       <p:sp>
         <p:nvSpPr>
-          <p:cNvPr id="31" name="Shape 29"/>
-          <p:cNvSpPr/>
-          <p:nvPr/>
-        </p:nvSpPr>
-        <p:spPr>
-          <a:xfrm>
-            <a:off x="7589520" y="2404872"/>
-            <a:ext cx="1097280" cy="411480"/>
-          </a:xfrm>
-          <a:prstGeom prst="rect">
-            <a:avLst/>
-          </a:prstGeom>
-          <a:solidFill>
-            <a:srgbClr val="0891B2"/>
-          </a:solidFill>
-          <a:ln w="12700">
-            <a:solidFill>
-              <a:srgbClr val="0891B2"/>
-            </a:solidFill>
-            <a:prstDash val="solid"/>
-          </a:ln>
-        </p:spPr>
-        <p:txBody>
-          <a:bodyPr/>
-          <a:lstStyle/>
-          <a:p>
-            <a:endParaRPr lang="en-US"/>
-          </a:p>
-        </p:txBody>
-      </p:sp>
-      <p:sp>
-        <p:nvSpPr>
-          <p:cNvPr id="32" name="Text 30"/>
-          <p:cNvSpPr/>
-          <p:nvPr/>
-        </p:nvSpPr>
-        <p:spPr>
-          <a:xfrm>
-            <a:off x="7589520" y="2404872"/>
-            <a:ext cx="1097280" cy="411480"/>
+          <p:cNvPr id="47" name="Shape 45"/>
+          <p:cNvSpPr/>
+          <p:nvPr/>
+        </p:nvSpPr>
+        <p:spPr>
+          <a:xfrm>
+            <a:off x="7818120" y="2816352"/>
+            <a:ext cx="868680" cy="411480"/>
+          </a:xfrm>
+          <a:prstGeom prst="rect">
+            <a:avLst/>
+          </a:prstGeom>
+          <a:solidFill>
+            <a:srgbClr val="DC2626"/>
+          </a:solidFill>
+          <a:ln w="12700">
+            <a:solidFill>
+              <a:srgbClr val="DC2626"/>
+            </a:solidFill>
+            <a:prstDash val="solid"/>
+          </a:ln>
+        </p:spPr>
+        <p:txBody>
+          <a:bodyPr/>
+          <a:lstStyle/>
+          <a:p>
+            <a:endParaRPr lang="en-US"/>
+          </a:p>
+        </p:txBody>
+      </p:sp>
+      <p:sp>
+        <p:nvSpPr>
+          <p:cNvPr id="48" name="Text 46"/>
+          <p:cNvSpPr/>
+          <p:nvPr/>
+        </p:nvSpPr>
+        <p:spPr>
+          <a:xfrm>
+            <a:off x="7818120" y="2816352"/>
+            <a:ext cx="868680" cy="411480"/>
           </a:xfrm>
           <a:prstGeom prst="rect">
             <a:avLst/>
@@ -12133,7 +12151,7 @@
                 <a:ea typeface="Calibri" pitchFamily="34" charset="-122"/>
                 <a:cs typeface="Calibri" pitchFamily="34" charset="-120"/>
               </a:rPr>
-              <a:t>31.8%</a:t>
+              <a:t>~$10K+</a:t>
             </a:r>
             <a:endParaRPr lang="en-US" sz="1300" dirty="0"/>
           </a:p>
@@ -12141,14 +12159,14 @@
       </p:sp>
       <p:sp>
         <p:nvSpPr>
-          <p:cNvPr id="33" name="Text 31"/>
-          <p:cNvSpPr/>
-          <p:nvPr/>
-        </p:nvSpPr>
-        <p:spPr>
-          <a:xfrm>
-            <a:off x="5376672" y="2395728"/>
-            <a:ext cx="2121408" cy="320040"/>
+          <p:cNvPr id="49" name="Text 47"/>
+          <p:cNvSpPr/>
+          <p:nvPr/>
+        </p:nvSpPr>
+        <p:spPr>
+          <a:xfrm>
+            <a:off x="5376672" y="2807208"/>
+            <a:ext cx="2395728" cy="320040"/>
           </a:xfrm>
           <a:prstGeom prst="rect">
             <a:avLst/>
@@ -12164,7 +12182,7 @@
               <a:buNone/>
             </a:pPr>
             <a:r>
-              <a:rPr lang="en-US" sz="1300" b="1" dirty="0">
+              <a:rPr lang="en-US" sz="1200" b="1" dirty="0">
                 <a:solidFill>
                   <a:srgbClr val="1B2A4A"/>
                 </a:solidFill>
@@ -12172,7 +12190,7 @@
                 <a:ea typeface="Calibri" pitchFamily="34" charset="-122"/>
                 <a:cs typeface="Calibri" pitchFamily="34" charset="-120"/>
               </a:rPr>
-              <a:t>Payroll Dominates</a:t>
+              <a:t>Costly Acquisition</a:t>
             </a:r>
             <a:endParaRPr lang="en-US" sz="1300" dirty="0"/>
           </a:p>
@@ -12180,611 +12198,14 @@
       </p:sp>
       <p:sp>
         <p:nvSpPr>
-          <p:cNvPr id="34" name="Text 32"/>
-          <p:cNvSpPr/>
-          <p:nvPr/>
-        </p:nvSpPr>
-        <p:spPr>
-          <a:xfrm>
-            <a:off x="5376672" y="2715768"/>
-            <a:ext cx="2121408" cy="219456"/>
-          </a:xfrm>
-          <a:prstGeom prst="rect">
-            <a:avLst/>
-          </a:prstGeom>
-          <a:noFill/>
-          <a:ln/>
-        </p:spPr>
-        <p:txBody>
-          <a:bodyPr wrap="square" rtlCol="0" anchor="ctr"/>
-          <a:lstStyle/>
-          <a:p>
-            <a:pPr marL="0" indent="0">
-              <a:buNone/>
-            </a:pPr>
-            <a:r>
-              <a:rPr lang="en-US" sz="1000" i="1" dirty="0">
-                <a:solidFill>
-                  <a:schemeClr val="tx2"/>
-                </a:solidFill>
-                <a:latin typeface="Calibri" pitchFamily="34" charset="0"/>
-                <a:ea typeface="Calibri" pitchFamily="34" charset="-122"/>
-                <a:cs typeface="Calibri" pitchFamily="34" charset="-120"/>
-              </a:rPr>
-              <a:t>Share of Expenses</a:t>
-            </a:r>
-            <a:endParaRPr lang="en-US" sz="1000" dirty="0">
-              <a:solidFill>
-                <a:schemeClr val="tx2"/>
-              </a:solidFill>
-            </a:endParaRPr>
-          </a:p>
-        </p:txBody>
-      </p:sp>
-      <p:sp>
-        <p:nvSpPr>
-          <p:cNvPr id="35" name="Text 33"/>
-          <p:cNvSpPr/>
-          <p:nvPr/>
-        </p:nvSpPr>
-        <p:spPr>
-          <a:xfrm>
-            <a:off x="4754880" y="2990088"/>
-            <a:ext cx="3931920" cy="502920"/>
-          </a:xfrm>
-          <a:prstGeom prst="rect">
-            <a:avLst/>
-          </a:prstGeom>
-          <a:noFill/>
-          <a:ln/>
-        </p:spPr>
-        <p:txBody>
-          <a:bodyPr wrap="square" rtlCol="0" anchor="ctr"/>
-          <a:lstStyle/>
-          <a:p>
-            <a:r>
-              <a:rPr lang="en-US" sz="1000" dirty="0">
-                <a:solidFill>
-                  <a:schemeClr val="tx2"/>
-                </a:solidFill>
-              </a:rPr>
-              <a:t>Payroll was the largest expense category at 31.82%, followed by marketing spend at 24.65% and cloud hosting at 14.61%.</a:t>
-            </a:r>
-          </a:p>
-        </p:txBody>
-      </p:sp>
-      <p:sp>
-        <p:nvSpPr>
-          <p:cNvPr id="36" name="Shape 34"/>
-          <p:cNvSpPr/>
-          <p:nvPr/>
-        </p:nvSpPr>
-        <p:spPr>
-          <a:xfrm>
-            <a:off x="320040" y="3703320"/>
-            <a:ext cx="4114800" cy="1234440"/>
-          </a:xfrm>
-          <a:prstGeom prst="rect">
-            <a:avLst/>
-          </a:prstGeom>
-          <a:solidFill>
-            <a:srgbClr val="F0F4F8"/>
-          </a:solidFill>
-          <a:ln w="12700">
-            <a:solidFill>
-              <a:srgbClr val="E2E8F0"/>
-            </a:solidFill>
-            <a:prstDash val="solid"/>
-          </a:ln>
-          <a:effectLst>
-            <a:outerShdw blurRad="50800" dist="12700" dir="8100000" algn="bl" rotWithShape="0">
-              <a:srgbClr val="000000">
-                <a:alpha val="6000"/>
-              </a:srgbClr>
-            </a:outerShdw>
-          </a:effectLst>
-        </p:spPr>
-        <p:txBody>
-          <a:bodyPr/>
-          <a:lstStyle/>
-          <a:p>
-            <a:endParaRPr lang="en-US"/>
-          </a:p>
-        </p:txBody>
-      </p:sp>
-      <p:sp>
-        <p:nvSpPr>
-          <p:cNvPr id="37" name="Shape 35"/>
-          <p:cNvSpPr/>
-          <p:nvPr/>
-        </p:nvSpPr>
-        <p:spPr>
-          <a:xfrm>
-            <a:off x="411480" y="3794760"/>
-            <a:ext cx="502920" cy="502920"/>
-          </a:xfrm>
-          <a:prstGeom prst="ellipse">
-            <a:avLst/>
-          </a:prstGeom>
-          <a:solidFill>
-            <a:srgbClr val="7C3AED"/>
-          </a:solidFill>
-          <a:ln w="12700">
-            <a:solidFill>
-              <a:srgbClr val="7C3AED"/>
-            </a:solidFill>
-            <a:prstDash val="solid"/>
-          </a:ln>
-        </p:spPr>
-        <p:txBody>
-          <a:bodyPr/>
-          <a:lstStyle/>
-          <a:p>
-            <a:endParaRPr lang="en-US"/>
-          </a:p>
-        </p:txBody>
-      </p:sp>
-      <p:sp>
-        <p:nvSpPr>
-          <p:cNvPr id="38" name="Text 36"/>
-          <p:cNvSpPr/>
-          <p:nvPr/>
-        </p:nvSpPr>
-        <p:spPr>
-          <a:xfrm>
-            <a:off x="411480" y="3794760"/>
-            <a:ext cx="502920" cy="502920"/>
-          </a:xfrm>
-          <a:prstGeom prst="rect">
-            <a:avLst/>
-          </a:prstGeom>
-          <a:noFill/>
-          <a:ln/>
-        </p:spPr>
-        <p:txBody>
-          <a:bodyPr wrap="square" rtlCol="0" anchor="ctr"/>
-          <a:lstStyle/>
-          <a:p>
-            <a:pPr marL="0" indent="0" algn="ctr">
-              <a:buNone/>
-            </a:pPr>
-            <a:r>
-              <a:rPr lang="en-US" sz="1200" b="1" dirty="0">
-                <a:solidFill>
-                  <a:srgbClr val="FFFFFF"/>
-                </a:solidFill>
-                <a:latin typeface="Calibri" pitchFamily="34" charset="0"/>
-                <a:ea typeface="Calibri" pitchFamily="34" charset="-122"/>
-                <a:cs typeface="Calibri" pitchFamily="34" charset="-120"/>
-              </a:rPr>
-              <a:t>05</a:t>
-            </a:r>
-            <a:endParaRPr lang="en-US" sz="1200" dirty="0"/>
-          </a:p>
-        </p:txBody>
-      </p:sp>
-      <p:sp>
-        <p:nvSpPr>
-          <p:cNvPr id="39" name="Shape 37"/>
-          <p:cNvSpPr/>
-          <p:nvPr/>
-        </p:nvSpPr>
-        <p:spPr>
-          <a:xfrm>
-            <a:off x="3246120" y="3776472"/>
-            <a:ext cx="1097280" cy="411480"/>
-          </a:xfrm>
-          <a:prstGeom prst="rect">
-            <a:avLst/>
-          </a:prstGeom>
-          <a:solidFill>
-            <a:srgbClr val="7C3AED"/>
-          </a:solidFill>
-          <a:ln w="12700">
-            <a:solidFill>
-              <a:srgbClr val="7C3AED"/>
-            </a:solidFill>
-            <a:prstDash val="solid"/>
-          </a:ln>
-        </p:spPr>
-        <p:txBody>
-          <a:bodyPr/>
-          <a:lstStyle/>
-          <a:p>
-            <a:endParaRPr lang="en-US"/>
-          </a:p>
-        </p:txBody>
-      </p:sp>
-      <p:sp>
-        <p:nvSpPr>
-          <p:cNvPr id="40" name="Text 38"/>
-          <p:cNvSpPr/>
-          <p:nvPr/>
-        </p:nvSpPr>
-        <p:spPr>
-          <a:xfrm>
-            <a:off x="3246120" y="3776472"/>
-            <a:ext cx="1097280" cy="411480"/>
-          </a:xfrm>
-          <a:prstGeom prst="rect">
-            <a:avLst/>
-          </a:prstGeom>
-          <a:noFill/>
-          <a:ln/>
-        </p:spPr>
-        <p:txBody>
-          <a:bodyPr wrap="square" rtlCol="0" anchor="ctr"/>
-          <a:lstStyle/>
-          <a:p>
-            <a:pPr marL="0" indent="0" algn="ctr">
-              <a:buNone/>
-            </a:pPr>
-            <a:r>
-              <a:rPr lang="en-US" sz="1300" b="1" dirty="0">
-                <a:solidFill>
-                  <a:srgbClr val="FFFFFF"/>
-                </a:solidFill>
-                <a:latin typeface="Calibri" pitchFamily="34" charset="0"/>
-                <a:ea typeface="Calibri" pitchFamily="34" charset="-122"/>
-                <a:cs typeface="Calibri" pitchFamily="34" charset="-120"/>
-              </a:rPr>
-              <a:t>Top 2</a:t>
-            </a:r>
-            <a:endParaRPr lang="en-US" sz="1300" dirty="0"/>
-          </a:p>
-        </p:txBody>
-      </p:sp>
-      <p:sp>
-        <p:nvSpPr>
-          <p:cNvPr id="41" name="Text 39"/>
-          <p:cNvSpPr/>
-          <p:nvPr/>
-        </p:nvSpPr>
-        <p:spPr>
-          <a:xfrm>
-            <a:off x="1033272" y="3767328"/>
-            <a:ext cx="2121408" cy="320040"/>
-          </a:xfrm>
-          <a:prstGeom prst="rect">
-            <a:avLst/>
-          </a:prstGeom>
-          <a:noFill/>
-          <a:ln/>
-        </p:spPr>
-        <p:txBody>
-          <a:bodyPr wrap="square" rtlCol="0" anchor="ctr"/>
-          <a:lstStyle/>
-          <a:p>
-            <a:pPr marL="0" indent="0">
-              <a:buNone/>
-            </a:pPr>
-            <a:r>
-              <a:rPr lang="en-US" sz="1300" b="1" dirty="0">
-                <a:solidFill>
-                  <a:srgbClr val="1B2A4A"/>
-                </a:solidFill>
-                <a:latin typeface="Calibri" pitchFamily="34" charset="0"/>
-                <a:ea typeface="Calibri" pitchFamily="34" charset="-122"/>
-                <a:cs typeface="Calibri" pitchFamily="34" charset="-120"/>
-              </a:rPr>
-              <a:t>Customer Concentration</a:t>
-            </a:r>
-            <a:endParaRPr lang="en-US" sz="1300" dirty="0"/>
-          </a:p>
-        </p:txBody>
-      </p:sp>
-      <p:sp>
-        <p:nvSpPr>
-          <p:cNvPr id="42" name="Text 40"/>
-          <p:cNvSpPr/>
-          <p:nvPr/>
-        </p:nvSpPr>
-        <p:spPr>
-          <a:xfrm>
-            <a:off x="1033272" y="4087368"/>
-            <a:ext cx="2121408" cy="219456"/>
-          </a:xfrm>
-          <a:prstGeom prst="rect">
-            <a:avLst/>
-          </a:prstGeom>
-          <a:noFill/>
-          <a:ln/>
-        </p:spPr>
-        <p:txBody>
-          <a:bodyPr wrap="square" rtlCol="0" anchor="ctr"/>
-          <a:lstStyle/>
-          <a:p>
-            <a:pPr marL="0" indent="0">
-              <a:buNone/>
-            </a:pPr>
-            <a:r>
-              <a:rPr lang="en-US" sz="1000" i="1" dirty="0">
-                <a:solidFill>
-                  <a:schemeClr val="tx2"/>
-                </a:solidFill>
-                <a:latin typeface="Calibri" pitchFamily="34" charset="0"/>
-                <a:ea typeface="Calibri" pitchFamily="34" charset="-122"/>
-                <a:cs typeface="Calibri" pitchFamily="34" charset="-120"/>
-              </a:rPr>
-              <a:t>Customers</a:t>
-            </a:r>
-            <a:endParaRPr lang="en-US" sz="1000" dirty="0">
-              <a:solidFill>
-                <a:schemeClr val="tx2"/>
-              </a:solidFill>
-            </a:endParaRPr>
-          </a:p>
-        </p:txBody>
-      </p:sp>
-      <p:sp>
-        <p:nvSpPr>
-          <p:cNvPr id="43" name="Text 41"/>
-          <p:cNvSpPr/>
-          <p:nvPr/>
-        </p:nvSpPr>
-        <p:spPr>
-          <a:xfrm>
-            <a:off x="411480" y="4361688"/>
-            <a:ext cx="3931920" cy="502920"/>
-          </a:xfrm>
-          <a:prstGeom prst="rect">
-            <a:avLst/>
-          </a:prstGeom>
-          <a:noFill/>
-          <a:ln/>
-        </p:spPr>
-        <p:txBody>
-          <a:bodyPr wrap="square" rtlCol="0" anchor="ctr"/>
-          <a:lstStyle/>
-          <a:p>
-            <a:pPr marL="0" indent="0">
-              <a:buNone/>
-            </a:pPr>
-            <a:r>
-              <a:rPr lang="en-US" sz="1000" dirty="0">
-                <a:solidFill>
-                  <a:srgbClr val="334155"/>
-                </a:solidFill>
-                <a:latin typeface="Calibri" pitchFamily="34" charset="0"/>
-                <a:ea typeface="Calibri" pitchFamily="34" charset="-122"/>
-                <a:cs typeface="Calibri" pitchFamily="34" charset="-120"/>
-              </a:rPr>
-              <a:t>TechStart Ltd and Nova Retail Group account for the majority of total revenue — concentration risk is material.</a:t>
-            </a:r>
-            <a:endParaRPr lang="en-US" sz="1000" dirty="0"/>
-          </a:p>
-        </p:txBody>
-      </p:sp>
-      <p:sp>
-        <p:nvSpPr>
-          <p:cNvPr id="44" name="Shape 42"/>
-          <p:cNvSpPr/>
-          <p:nvPr/>
-        </p:nvSpPr>
-        <p:spPr>
-          <a:xfrm>
-            <a:off x="4663440" y="3703320"/>
-            <a:ext cx="4114800" cy="1234440"/>
-          </a:xfrm>
-          <a:prstGeom prst="rect">
-            <a:avLst/>
-          </a:prstGeom>
-          <a:solidFill>
-            <a:srgbClr val="F0F4F8"/>
-          </a:solidFill>
-          <a:ln w="12700">
-            <a:solidFill>
-              <a:srgbClr val="E2E8F0"/>
-            </a:solidFill>
-            <a:prstDash val="solid"/>
-          </a:ln>
-          <a:effectLst>
-            <a:outerShdw blurRad="50800" dist="12700" dir="8100000" algn="bl" rotWithShape="0">
-              <a:srgbClr val="000000">
-                <a:alpha val="6000"/>
-              </a:srgbClr>
-            </a:outerShdw>
-          </a:effectLst>
-        </p:spPr>
-        <p:txBody>
-          <a:bodyPr/>
-          <a:lstStyle/>
-          <a:p>
-            <a:endParaRPr lang="en-US"/>
-          </a:p>
-        </p:txBody>
-      </p:sp>
-      <p:sp>
-        <p:nvSpPr>
-          <p:cNvPr id="45" name="Shape 43"/>
-          <p:cNvSpPr/>
-          <p:nvPr/>
-        </p:nvSpPr>
-        <p:spPr>
-          <a:xfrm>
-            <a:off x="4754880" y="3794760"/>
-            <a:ext cx="502920" cy="502920"/>
-          </a:xfrm>
-          <a:prstGeom prst="ellipse">
-            <a:avLst/>
-          </a:prstGeom>
-          <a:solidFill>
-            <a:srgbClr val="DC2626"/>
-          </a:solidFill>
-          <a:ln w="12700">
-            <a:solidFill>
-              <a:srgbClr val="DC2626"/>
-            </a:solidFill>
-            <a:prstDash val="solid"/>
-          </a:ln>
-        </p:spPr>
-        <p:txBody>
-          <a:bodyPr/>
-          <a:lstStyle/>
-          <a:p>
-            <a:endParaRPr lang="en-US"/>
-          </a:p>
-        </p:txBody>
-      </p:sp>
-      <p:sp>
-        <p:nvSpPr>
-          <p:cNvPr id="46" name="Text 44"/>
-          <p:cNvSpPr/>
-          <p:nvPr/>
-        </p:nvSpPr>
-        <p:spPr>
-          <a:xfrm>
-            <a:off x="4754880" y="3794760"/>
-            <a:ext cx="502920" cy="502920"/>
-          </a:xfrm>
-          <a:prstGeom prst="rect">
-            <a:avLst/>
-          </a:prstGeom>
-          <a:noFill/>
-          <a:ln/>
-        </p:spPr>
-        <p:txBody>
-          <a:bodyPr wrap="square" rtlCol="0" anchor="ctr"/>
-          <a:lstStyle/>
-          <a:p>
-            <a:pPr marL="0" indent="0" algn="ctr">
-              <a:buNone/>
-            </a:pPr>
-            <a:r>
-              <a:rPr lang="en-US" sz="1200" b="1" dirty="0">
-                <a:solidFill>
-                  <a:srgbClr val="FFFFFF"/>
-                </a:solidFill>
-                <a:latin typeface="Calibri" pitchFamily="34" charset="0"/>
-                <a:ea typeface="Calibri" pitchFamily="34" charset="-122"/>
-                <a:cs typeface="Calibri" pitchFamily="34" charset="-120"/>
-              </a:rPr>
-              <a:t>06</a:t>
-            </a:r>
-            <a:endParaRPr lang="en-US" sz="1200" dirty="0"/>
-          </a:p>
-        </p:txBody>
-      </p:sp>
-      <p:sp>
-        <p:nvSpPr>
-          <p:cNvPr id="47" name="Shape 45"/>
-          <p:cNvSpPr/>
-          <p:nvPr/>
-        </p:nvSpPr>
-        <p:spPr>
-          <a:xfrm>
-            <a:off x="7589520" y="3776472"/>
-            <a:ext cx="1097280" cy="411480"/>
-          </a:xfrm>
-          <a:prstGeom prst="rect">
-            <a:avLst/>
-          </a:prstGeom>
-          <a:solidFill>
-            <a:srgbClr val="DC2626"/>
-          </a:solidFill>
-          <a:ln w="12700">
-            <a:solidFill>
-              <a:srgbClr val="DC2626"/>
-            </a:solidFill>
-            <a:prstDash val="solid"/>
-          </a:ln>
-        </p:spPr>
-        <p:txBody>
-          <a:bodyPr/>
-          <a:lstStyle/>
-          <a:p>
-            <a:endParaRPr lang="en-US"/>
-          </a:p>
-        </p:txBody>
-      </p:sp>
-      <p:sp>
-        <p:nvSpPr>
-          <p:cNvPr id="48" name="Text 46"/>
-          <p:cNvSpPr/>
-          <p:nvPr/>
-        </p:nvSpPr>
-        <p:spPr>
-          <a:xfrm>
-            <a:off x="7589520" y="3776472"/>
-            <a:ext cx="1097280" cy="411480"/>
-          </a:xfrm>
-          <a:prstGeom prst="rect">
-            <a:avLst/>
-          </a:prstGeom>
-          <a:noFill/>
-          <a:ln/>
-        </p:spPr>
-        <p:txBody>
-          <a:bodyPr wrap="square" rtlCol="0" anchor="ctr"/>
-          <a:lstStyle/>
-          <a:p>
-            <a:pPr marL="0" indent="0" algn="ctr">
-              <a:buNone/>
-            </a:pPr>
-            <a:r>
-              <a:rPr lang="en-US" sz="1300" b="1" dirty="0">
-                <a:solidFill>
-                  <a:srgbClr val="FFFFFF"/>
-                </a:solidFill>
-                <a:latin typeface="Calibri" pitchFamily="34" charset="0"/>
-                <a:ea typeface="Calibri" pitchFamily="34" charset="-122"/>
-                <a:cs typeface="Calibri" pitchFamily="34" charset="-120"/>
-              </a:rPr>
-              <a:t>&gt;$10K</a:t>
-            </a:r>
-            <a:endParaRPr lang="en-US" sz="1300" dirty="0"/>
-          </a:p>
-        </p:txBody>
-      </p:sp>
-      <p:sp>
-        <p:nvSpPr>
-          <p:cNvPr id="49" name="Text 47"/>
-          <p:cNvSpPr/>
-          <p:nvPr/>
-        </p:nvSpPr>
-        <p:spPr>
-          <a:xfrm>
-            <a:off x="5376672" y="3767328"/>
-            <a:ext cx="2121408" cy="320040"/>
-          </a:xfrm>
-          <a:prstGeom prst="rect">
-            <a:avLst/>
-          </a:prstGeom>
-          <a:noFill/>
-          <a:ln/>
-        </p:spPr>
-        <p:txBody>
-          <a:bodyPr wrap="square" rtlCol="0" anchor="ctr"/>
-          <a:lstStyle/>
-          <a:p>
-            <a:pPr marL="0" indent="0">
-              <a:buNone/>
-            </a:pPr>
-            <a:r>
-              <a:rPr lang="en-US" sz="1300" b="1" dirty="0">
-                <a:solidFill>
-                  <a:srgbClr val="1B2A4A"/>
-                </a:solidFill>
-                <a:latin typeface="Calibri" pitchFamily="34" charset="0"/>
-                <a:ea typeface="Calibri" pitchFamily="34" charset="-122"/>
-                <a:cs typeface="Calibri" pitchFamily="34" charset="-120"/>
-              </a:rPr>
-              <a:t>CAC Rising</a:t>
-            </a:r>
-            <a:endParaRPr lang="en-US" sz="1300" dirty="0"/>
-          </a:p>
-        </p:txBody>
-      </p:sp>
-      <p:sp>
-        <p:nvSpPr>
           <p:cNvPr id="50" name="Text 48"/>
           <p:cNvSpPr/>
           <p:nvPr/>
         </p:nvSpPr>
         <p:spPr>
           <a:xfrm>
-            <a:off x="5376672" y="4087368"/>
-            <a:ext cx="2121408" cy="219456"/>
+            <a:off x="5376672" y="3127248"/>
+            <a:ext cx="2395728" cy="219456"/>
           </a:xfrm>
           <a:prstGeom prst="rect">
             <a:avLst/>
@@ -12802,7 +12223,7 @@
                   <a:schemeClr val="tx2"/>
                 </a:solidFill>
               </a:rPr>
-              <a:t>Growth Months</a:t>
+              <a:t>CAC, Mar–Jun</a:t>
             </a:r>
           </a:p>
         </p:txBody>
@@ -12815,8 +12236,8 @@
         </p:nvSpPr>
         <p:spPr>
           <a:xfrm>
-            <a:off x="4754880" y="4361688"/>
-            <a:ext cx="3931920" cy="502920"/>
+            <a:off x="4754880" y="3383280"/>
+            <a:ext cx="3931920" cy="868680"/>
           </a:xfrm>
           <a:prstGeom prst="rect">
             <a:avLst/>
@@ -12825,16 +12246,50 @@
           <a:ln/>
         </p:spPr>
         <p:txBody>
-          <a:bodyPr wrap="square" rtlCol="0" anchor="ctr"/>
-          <a:lstStyle/>
-          <a:p>
-            <a:r>
-              <a:rPr lang="en-US" sz="1000" dirty="0">
+          <a:bodyPr wrap="square" rtlCol="0" anchor="t"/>
+          <a:lstStyle/>
+          <a:p>
+            <a:r>
+              <a:rPr lang="en-US" sz="1200" dirty="0">
                 <a:solidFill>
                   <a:schemeClr val="tx2"/>
                 </a:solidFill>
               </a:rPr>
-              <a:t>CAC crossed $10K during multiple growth months, so acquisition efficiency should be monitored against LTV.</a:t>
+              <a:t>Each new customer cost $9.8K–$11.6K in marketing, against under $2K a month in revenue per customer.</a:t>
+            </a:r>
+          </a:p>
+        </p:txBody>
+      </p:sp>
+      <p:sp>
+        <p:nvSpPr>
+          <p:cNvPr id="52" name="TextBox 51"/>
+          <p:cNvSpPr txBox="1"/>
+          <p:nvPr/>
+        </p:nvSpPr>
+        <p:spPr>
+          <a:xfrm>
+            <a:off x="320040" y="4434840"/>
+            <a:ext cx="8458200" cy="228600"/>
+          </a:xfrm>
+          <a:prstGeom prst="rect">
+            <a:avLst/>
+          </a:prstGeom>
+          <a:noFill/>
+        </p:spPr>
+        <p:txBody>
+          <a:bodyPr wrap="square" lIns="0" tIns="0" rIns="0" bIns="0">
+            <a:spAutoFit/>
+          </a:bodyPr>
+          <a:lstStyle/>
+          <a:p>
+            <a:r>
+              <a:rPr sz="1000" i="1">
+                <a:solidFill>
+                  <a:srgbClr val="64748B"/>
+                </a:solidFill>
+                <a:latin typeface="Calibri"/>
+              </a:rPr>
+              <a:t>Fictional company · Jan–Jun 2024 data · Source: NovaPay FP&amp;A Excel model</a:t>
             </a:r>
           </a:p>
         </p:txBody>
@@ -13150,7 +12605,7 @@
                 <a:ea typeface="Calibri" pitchFamily="34" charset="-122"/>
                 <a:cs typeface="Calibri" pitchFamily="34" charset="-120"/>
               </a:rPr>
-              <a:t>Establish monthly spend reviews for marketing and cloud hosting. Flag any line exceeding 10% of budget for CFO approval. Target 15% reduction in variable costs within two quarters.</a:t>
+              <a:t>Establish monthly spend reviews for marketing and cloud hosting. Flag any line exceeding 10% of budget for CFO approval.</a:t>
             </a:r>
             <a:endParaRPr lang="en-US" sz="1050" dirty="0"/>
           </a:p>
@@ -13537,7 +12992,7 @@
                 <a:ea typeface="Calibri" pitchFamily="34" charset="-122"/>
                 <a:cs typeface="Calibri" pitchFamily="34" charset="-120"/>
               </a:rPr>
-              <a:t>Track CAC vs. LTV</a:t>
+              <a:t>Track Acquisition Efficiency</a:t>
             </a:r>
             <a:endParaRPr lang="en-US" sz="1300" dirty="0"/>
           </a:p>
@@ -13576,7 +13031,7 @@
                 <a:ea typeface="Calibri" pitchFamily="34" charset="-122"/>
                 <a:cs typeface="Calibri" pitchFamily="34" charset="-120"/>
               </a:rPr>
-              <a:t>Implement a monthly CAC-to-LTV dashboard. High-risk months (CAC &gt; $10K) should trigger a marketing mix review. Target a minimum 3:1 LTV:CAC ratio.</a:t>
+              <a:t>Track CAC against revenue per customer monthly. High-risk months (CAC &gt; $10K) should trigger a marketing mix review.</a:t>
             </a:r>
             <a:endParaRPr lang="en-US" sz="1050" dirty="0"/>
           </a:p>
@@ -13789,7 +13244,7 @@
                 <a:ea typeface="Calibri" pitchFamily="34" charset="-122"/>
                 <a:cs typeface="Calibri" pitchFamily="34" charset="-120"/>
               </a:rPr>
-              <a:t>Diversify the customer base to reduce single-customer revenue dependency. A pipeline of 3–5 new SMB clients per quarter would meaningfully reduce concentration risk.</a:t>
+              <a:t>Diversify the customer base to reduce single-customer revenue dependency.</a:t>
             </a:r>
             <a:endParaRPr lang="en-US" sz="1050" dirty="0"/>
           </a:p>
@@ -14106,7 +13561,7 @@
                 <a:ea typeface="Calibri" pitchFamily="34" charset="-122"/>
                 <a:cs typeface="Calibri" pitchFamily="34" charset="-120"/>
               </a:rPr>
-              <a:t>Forecasting &amp; Analytics Value</a:t>
+              <a:t>Scenario Analysis &amp; Analytics</a:t>
             </a:r>
             <a:endParaRPr lang="en-US" sz="2400" dirty="0"/>
           </a:p>
@@ -14145,7 +13600,7 @@
                 <a:ea typeface="Calibri" pitchFamily="34" charset="-122"/>
                 <a:cs typeface="Calibri" pitchFamily="34" charset="-120"/>
               </a:rPr>
-              <a:t>Three-Scenario Forecast Model</a:t>
+              <a:t>Three-Scenario Analysis: July 2024 from June Actuals</a:t>
             </a:r>
             <a:endParaRPr lang="en-US" sz="1400" dirty="0"/>
           </a:p>
@@ -14289,7 +13744,7 @@
                           <a:ea typeface="Calibri" pitchFamily="34" charset="-122"/>
                           <a:cs typeface="Calibri" pitchFamily="34" charset="-120"/>
                         </a:rPr>
-                        <a:t>Growth Rate</a:t>
+                        <a:t>Revenue Growth</a:t>
                       </a:r>
                       <a:endParaRPr lang="en-US" sz="1200" dirty="0">
                         <a:latin typeface="Calibri" charset="0"/>
@@ -14357,7 +13812,7 @@
                           <a:ea typeface="Calibri" pitchFamily="34" charset="-122"/>
                           <a:cs typeface="Calibri" pitchFamily="34" charset="-120"/>
                         </a:rPr>
-                        <a:t>Churn Rate</a:t>
+                        <a:t>Payroll Inflation</a:t>
                       </a:r>
                       <a:endParaRPr lang="en-US" sz="1200" dirty="0">
                         <a:latin typeface="Calibri" charset="0"/>
@@ -14425,7 +13880,7 @@
                           <a:ea typeface="Calibri" pitchFamily="34" charset="-122"/>
                           <a:cs typeface="Calibri" pitchFamily="34" charset="-120"/>
                         </a:rPr>
-                        <a:t>Forecast EBITDA</a:t>
+                        <a:t>July EBITDA</a:t>
                       </a:r>
                       <a:endParaRPr lang="en-US" sz="1200" dirty="0">
                         <a:latin typeface="Calibri" charset="0"/>
@@ -14568,7 +14023,7 @@
                           <a:ea typeface="Calibri" pitchFamily="34" charset="-122"/>
                           <a:cs typeface="Calibri" pitchFamily="34" charset="-120"/>
                         </a:rPr>
-                        <a:t>12%</a:t>
+                        <a:t>8%</a:t>
                       </a:r>
                       <a:endParaRPr lang="en-US" sz="1200" dirty="0">
                         <a:latin typeface="Calibri" charset="0"/>
@@ -14636,7 +14091,7 @@
                           <a:ea typeface="Calibri" pitchFamily="34" charset="-122"/>
                           <a:cs typeface="Calibri" pitchFamily="34" charset="-120"/>
                         </a:rPr>
-                        <a:t>3%</a:t>
+                        <a:t>4%</a:t>
                       </a:r>
                       <a:endParaRPr lang="en-US" sz="1200" dirty="0">
                         <a:latin typeface="Calibri" charset="0"/>
@@ -14704,7 +14159,7 @@
                           <a:ea typeface="Calibri" pitchFamily="34" charset="-122"/>
                           <a:cs typeface="Calibri" pitchFamily="34" charset="-120"/>
                         </a:rPr>
-                        <a:t>Moderate positive</a:t>
+                        <a:t>–$39.0K</a:t>
                       </a:r>
                       <a:endParaRPr lang="en-US" sz="1200" dirty="0">
                         <a:latin typeface="Calibri" charset="0"/>
@@ -14779,7 +14234,7 @@
                           <a:ea typeface="Calibri" pitchFamily="34" charset="-122"/>
                           <a:cs typeface="Calibri" pitchFamily="34" charset="-120"/>
                         </a:rPr>
-                        <a:t>Bull Case</a:t>
+                        <a:t>Upside Case</a:t>
                       </a:r>
                       <a:endParaRPr lang="en-US" sz="1200" dirty="0">
                         <a:latin typeface="Calibri" charset="0"/>
@@ -14847,7 +14302,7 @@
                           <a:ea typeface="Calibri" pitchFamily="34" charset="-122"/>
                           <a:cs typeface="Calibri" pitchFamily="34" charset="-120"/>
                         </a:rPr>
-                        <a:t>20%</a:t>
+                        <a:t>12%</a:t>
                       </a:r>
                       <a:endParaRPr lang="en-US" sz="1200" dirty="0">
                         <a:latin typeface="Calibri" charset="0"/>
@@ -14915,7 +14370,7 @@
                           <a:ea typeface="Calibri" pitchFamily="34" charset="-122"/>
                           <a:cs typeface="Calibri" pitchFamily="34" charset="-120"/>
                         </a:rPr>
-                        <a:t>1.5%</a:t>
+                        <a:t>3%</a:t>
                       </a:r>
                       <a:endParaRPr lang="en-US" sz="1200" dirty="0">
                         <a:latin typeface="Calibri" charset="0"/>
@@ -14983,7 +14438,7 @@
                           <a:ea typeface="Calibri" pitchFamily="34" charset="-122"/>
                           <a:cs typeface="Calibri" pitchFamily="34" charset="-120"/>
                         </a:rPr>
-                        <a:t>Strong improvement</a:t>
+                        <a:t>–$38.3K</a:t>
                       </a:r>
                       <a:endParaRPr lang="en-US" sz="1200" dirty="0">
                         <a:latin typeface="Calibri" charset="0"/>
@@ -15058,7 +14513,7 @@
                           <a:ea typeface="Calibri" pitchFamily="34" charset="-122"/>
                           <a:cs typeface="Calibri" pitchFamily="34" charset="-120"/>
                         </a:rPr>
-                        <a:t>Bear Case</a:t>
+                        <a:t>Downside Case</a:t>
                       </a:r>
                       <a:endParaRPr lang="en-US" sz="1200" dirty="0">
                         <a:latin typeface="Calibri" charset="0"/>
@@ -15126,7 +14581,7 @@
                           <a:ea typeface="Calibri" pitchFamily="34" charset="-122"/>
                           <a:cs typeface="Calibri" pitchFamily="34" charset="-120"/>
                         </a:rPr>
-                        <a:t>5%</a:t>
+                        <a:t>4%</a:t>
                       </a:r>
                       <a:endParaRPr lang="en-US" sz="1200" dirty="0">
                         <a:latin typeface="Calibri" charset="0"/>
@@ -15194,7 +14649,7 @@
                           <a:ea typeface="Calibri" pitchFamily="34" charset="-122"/>
                           <a:cs typeface="Calibri" pitchFamily="34" charset="-120"/>
                         </a:rPr>
-                        <a:t>8%</a:t>
+                        <a:t>6%</a:t>
                       </a:r>
                       <a:endParaRPr lang="en-US" sz="1200" dirty="0">
                         <a:latin typeface="Calibri" charset="0"/>
@@ -15262,7 +14717,7 @@
                           <a:ea typeface="Calibri" pitchFamily="34" charset="-122"/>
                           <a:cs typeface="Calibri" pitchFamily="34" charset="-120"/>
                         </a:rPr>
-                        <a:t>Deeper loss</a:t>
+                        <a:t>–$40.1K</a:t>
                       </a:r>
                       <a:endParaRPr lang="en-US" sz="1200" dirty="0">
                         <a:latin typeface="Calibri" charset="0"/>
@@ -15412,7 +14867,7 @@
           <a:ln/>
         </p:spPr>
         <p:txBody>
-          <a:bodyPr wrap="square" rtlCol="0" anchor="ctr"/>
+          <a:bodyPr wrap="square" rtlCol="0" anchor="t"/>
           <a:lstStyle/>
           <a:p>
             <a:pPr marL="342900" indent="-342900">
@@ -15428,7 +14883,7 @@
                 <a:ea typeface="Calibri" pitchFamily="34" charset="-122"/>
                 <a:cs typeface="Calibri" pitchFamily="34" charset="-120"/>
               </a:rPr>
-              <a:t>Scenario-based revenue &amp; EBITDA forecasting</a:t>
+              <a:t>Scenario-based revenue &amp; EBITDA analysis</a:t>
             </a:r>
             <a:endParaRPr lang="en-US" sz="1150" dirty="0"/>
           </a:p>
@@ -15446,7 +14901,7 @@
                 <a:ea typeface="Calibri" pitchFamily="34" charset="-122"/>
                 <a:cs typeface="Calibri" pitchFamily="34" charset="-120"/>
               </a:rPr>
-              <a:t>Automated KPI risk flagging (churn, CAC)</a:t>
+              <a:t>Budget vs. actual variance analysis</a:t>
             </a:r>
             <a:endParaRPr lang="en-US" sz="1150" dirty="0"/>
           </a:p>
@@ -15464,7 +14919,7 @@
                 <a:ea typeface="Calibri" pitchFamily="34" charset="-122"/>
                 <a:cs typeface="Calibri" pitchFamily="34" charset="-120"/>
               </a:rPr>
-              <a:t>Dynamic expense variance alerts</a:t>
+              <a:t>Revenue-to-EBITDA bridge</a:t>
             </a:r>
             <a:endParaRPr lang="en-US" sz="1150" dirty="0"/>
           </a:p>
@@ -15500,7 +14955,7 @@
                 <a:ea typeface="Calibri" pitchFamily="34" charset="-122"/>
                 <a:cs typeface="Calibri" pitchFamily="34" charset="-120"/>
               </a:rPr>
-              <a:t>CFO auto-commentary generation</a:t>
+              <a:t>KPI risk flagging in SQL (churn, CAC)</a:t>
             </a:r>
             <a:endParaRPr lang="en-US" sz="1150" dirty="0"/>
           </a:p>
@@ -15628,7 +15083,7 @@
                 <a:ea typeface="Calibri" pitchFamily="34" charset="-122"/>
                 <a:cs typeface="Calibri" pitchFamily="34" charset="-120"/>
               </a:rPr>
-              <a:t>Forecast Scenarios</a:t>
+              <a:t>Scenarios</a:t>
             </a:r>
             <a:endParaRPr lang="en-US" sz="1050" dirty="0"/>
           </a:p>
@@ -15848,9 +15303,43 @@
                 <a:ea typeface="Calibri" pitchFamily="34" charset="-122"/>
                 <a:cs typeface="Calibri" pitchFamily="34" charset="-120"/>
               </a:rPr>
-              <a:t>Python Forecasting</a:t>
+              <a:t>Months of Data</a:t>
             </a:r>
             <a:endParaRPr lang="en-US" sz="1050" dirty="0"/>
+          </a:p>
+        </p:txBody>
+      </p:sp>
+      <p:sp>
+        <p:nvSpPr>
+          <p:cNvPr id="18" name="TextBox 17"/>
+          <p:cNvSpPr txBox="1"/>
+          <p:nvPr/>
+        </p:nvSpPr>
+        <p:spPr>
+          <a:xfrm>
+            <a:off x="365760" y="4114800"/>
+            <a:ext cx="5166360" cy="420000"/>
+          </a:xfrm>
+          <a:prstGeom prst="rect">
+            <a:avLst/>
+          </a:prstGeom>
+          <a:noFill/>
+        </p:spPr>
+        <p:txBody>
+          <a:bodyPr wrap="square" lIns="0" tIns="0" rIns="0" bIns="0">
+            <a:spAutoFit/>
+          </a:bodyPr>
+          <a:lstStyle/>
+          <a:p>
+            <a:r>
+              <a:rPr sz="1000" i="1">
+                <a:solidFill>
+                  <a:srgbClr val="64748B"/>
+                </a:solidFill>
+                <a:latin typeface="Calibri"/>
+              </a:rPr>
+              <a:t>One-month scenario analysis from June actuals, not a statistical forecast. All three scenarios keep EBITDA negative.</a:t>
+            </a:r>
           </a:p>
         </p:txBody>
       </p:sp>
